--- a/learning/P01_zephyr_make_project/slides/P008_Zephyr应用构建_Windows.pptx
+++ b/learning/P01_zephyr_make_project/slides/P008_Zephyr应用构建_Windows.pptx
@@ -760,66 +760,100 @@
           <a:lstStyle/>
           <a:p>
             <a:r>
+              <a:rPr/>
               <a:t>对应正文：P008_Zephyr应用构建_Windows.md</a:t>
             </a:r>
           </a:p>
           <a:p>
             <a:r>
+              <a:rPr/>
               <a:t>8.2.1 · 逐项成立后才执行配置</a:t>
             </a:r>
           </a:p>
           <a:p>
             <a:r>
+              <a:rPr/>
               <a:t>P001：官方 hello_world、MPS2 板与构建脚本完整。</a:t>
             </a:r>
           </a:p>
           <a:p>
             <a:r>
-              <a:t>P002：CMake、Ninja、dtc、gperf 与已激活的 Python venv。</a:t>
-            </a:r>
-          </a:p>
-          <a:p>
-            <a:r>
+              <a:rPr>
+                <a:solidFill>
+                  <a:srgbClr val="29263B"/>
+                </a:solidFill>
+              </a:rPr>
+              <a:t>P002：CMake、Ninja 与已激活的 Python venv；</a:t>
+            </a:r>
+            <a:r>
+              <a:rPr>
+                <a:solidFill>
+                  <a:srgbClr val="A02B93"/>
+                </a:solidFill>
+              </a:rPr>
+              <a:t>dtc</a:t>
+            </a:r>
+            <a:r>
+              <a:rPr>
+                <a:solidFill>
+                  <a:srgbClr val="29263B"/>
+                </a:solidFill>
+              </a:rPr>
+              <a:t>、</a:t>
+            </a:r>
+            <a:r>
+              <a:rPr>
+                <a:solidFill>
+                  <a:srgbClr val="A02B93"/>
+                </a:solidFill>
+              </a:rPr>
+              <a:t>gperf</a:t>
+            </a:r>
+            <a:r>
+              <a:rPr>
+                <a:solidFill>
+                  <a:srgbClr val="29263B"/>
+                </a:solidFill>
+              </a:rPr>
+              <a:t xml:space="preserve"> 按用途准备。</a:t>
+            </a:r>
+          </a:p>
+          <a:p>
+            <a:r>
+              <a:rPr/>
               <a:t>P003：SDK 包能被发现，而且已包含 ARM 工具链。</a:t>
             </a:r>
           </a:p>
           <a:p>
             <a:r>
+              <a:rPr/>
               <a:t>P004：west 指向正确工作区，CMSIS_6 入口与 Core 头确实存在。</a:t>
             </a:r>
           </a:p>
           <a:p>
             <a:r>
+              <a:rPr/>
               <a:t>MPS2 的底层支持已在主源码；这次不追加 HC32 HAL。</a:t>
             </a:r>
           </a:p>
-          <a:p>
-            <a:r>
-              <a:t/>
-            </a:r>
-          </a:p>
-          <a:p>
-            <a:r>
-              <a:t/>
-            </a:r>
-          </a:p>
-          <a:p>
-            <a:r>
+          <a:p/>
+          <a:p/>
+          <a:p>
+            <a:r>
+              <a:rPr/>
               <a:t>依据：https://docs.zephyrproject.org/latest/build/cmake/index.html</a:t>
             </a:r>
           </a:p>
           <a:p>
             <a:r>
+              <a:rPr/>
               <a:t>本机原件：doc/build/cmake/index.rst</a:t>
             </a:r>
           </a:p>
-          <a:p>
-            <a:r>
-              <a:t/>
-            </a:r>
-          </a:p>
-          <a:p>
-            <a:r>
+          <a:p/>
+          <a:p>
+            <a:r>
+              <a:rPr/>
               <a:t>命令供读者执行；本轮文稿整理未在 G 盘代执行实验。</a:t>
             </a:r>
           </a:p>
@@ -1385,72 +1419,213 @@
           <a:lstStyle/>
           <a:p>
             <a:r>
+              <a:rPr/>
               <a:t>对应正文：P008_Zephyr应用构建_Windows.md#cmake-build-command</a:t>
             </a:r>
           </a:p>
           <a:p>
             <a:r>
+              <a:rPr/>
               <a:t>8.2.3 · ① 配置和构建</a:t>
             </a:r>
           </a:p>
           <a:p>
             <a:r>
+              <a:rPr/>
               <a:t>cmake --build 调用已配置的 Ninja，不再重复选板。</a:t>
             </a:r>
           </a:p>
           <a:p>
             <a:r>
-              <a:t>首次构建得到 zephyr/zephyr.elf。无改动时通常无需重编译。</a:t>
-            </a:r>
-          </a:p>
-          <a:p>
-            <a:r>
+              <a:rPr>
+                <a:solidFill>
+                  <a:srgbClr val="29263B"/>
+                </a:solidFill>
+              </a:rPr>
+              <a:t xml:space="preserve">本次构建成功才核对 </a:t>
+            </a:r>
+            <a:r>
+              <a:rPr>
+                <a:solidFill>
+                  <a:srgbClr val="0070C0"/>
+                </a:solidFill>
+              </a:rPr>
+              <a:t>zephyr/zephyr.elf</a:t>
+            </a:r>
+            <a:r>
+              <a:rPr>
+                <a:solidFill>
+                  <a:srgbClr val="29263B"/>
+                </a:solidFill>
+              </a:rPr>
+              <a:t>；旧文件不能证明本次成功。</a:t>
+            </a:r>
+          </a:p>
+          <a:p>
+            <a:r>
+              <a:rPr/>
               <a:t>修改 main.c 后仍用这条命令，按依赖更新对象与链接。</a:t>
             </a:r>
           </a:p>
-          <a:p>
-            <a:endParaRPr/>
-          </a:p>
-          <a:p>
-            <a:r>
-              <a:t># UCRT64；源码根；前提：上一页配置成功，.venv 已激活。</a:t>
-            </a:r>
-          </a:p>
-          <a:p>
-            <a:r>
+          <a:p/>
+          <a:p>
+            <a:r>
+              <a:rPr>
+                <a:solidFill>
+                  <a:srgbClr val="646173"/>
+                </a:solidFill>
+              </a:rPr>
+              <a:t># UCRT64；源码根；上一页配置成功，.venv 已激活。</a:t>
+            </a:r>
+          </a:p>
+          <a:p>
+            <a:r>
+              <a:rPr>
+                <a:solidFill>
+                  <a:srgbClr val="646173"/>
+                </a:solidFill>
+              </a:rPr>
+              <a:t># 前一步成功后才检查 ELF，再观察增量构建。</a:t>
+            </a:r>
+          </a:p>
+          <a:p>
+            <a:r>
+              <a:rPr>
+                <a:solidFill>
+                  <a:srgbClr val="A02B93"/>
+                </a:solidFill>
+              </a:rPr>
+              <a:t>cmake</a:t>
+            </a:r>
+            <a:r>
+              <a:rPr>
+                <a:solidFill>
+                  <a:srgbClr val="29263B"/>
+                </a:solidFill>
+              </a:rPr>
+              <a:t xml:space="preserve"> </a:t>
+            </a:r>
+            <a:r>
+              <a:rPr>
+                <a:solidFill>
+                  <a:srgbClr val="B84E00"/>
+                </a:solidFill>
+              </a:rPr>
+              <a:t>--build</a:t>
+            </a:r>
+            <a:r>
+              <a:rPr>
+                <a:solidFill>
+                  <a:srgbClr val="29263B"/>
+                </a:solidFill>
+              </a:rPr>
+              <a:t xml:space="preserve"> </a:t>
+            </a:r>
+            <a:r>
+              <a:rPr>
+                <a:solidFill>
+                  <a:srgbClr val="0070C0"/>
+                </a:solidFill>
+              </a:rPr>
+              <a:t>build/learning-tools/p003/cmake-demo</a:t>
+            </a:r>
+            <a:r>
+              <a:rPr>
+                <a:solidFill>
+                  <a:srgbClr val="29263B"/>
+                </a:solidFill>
+              </a:rPr>
+              <a:t xml:space="preserve"> </a:t>
+            </a:r>
+            <a:r>
+              <a:rPr>
+                <a:solidFill>
+                  <a:srgbClr val="B84E00"/>
+                </a:solidFill>
+              </a:rPr>
+              <a:t>--parallel</a:t>
+            </a:r>
+            <a:r>
+              <a:rPr>
+                <a:solidFill>
+                  <a:srgbClr val="29263B"/>
+                </a:solidFill>
+              </a:rPr>
+              <a:t xml:space="preserve"> 4 &amp;&amp;</a:t>
+            </a:r>
+          </a:p>
+          <a:p>
+            <a:r>
+              <a:rPr>
+                <a:solidFill>
+                  <a:srgbClr val="A02B93"/>
+                </a:solidFill>
+              </a:rPr>
+              <a:t>ls</a:t>
+            </a:r>
+            <a:r>
+              <a:rPr>
+                <a:solidFill>
+                  <a:srgbClr val="29263B"/>
+                </a:solidFill>
+              </a:rPr>
+              <a:t xml:space="preserve"> </a:t>
+            </a:r>
+            <a:r>
+              <a:rPr>
+                <a:solidFill>
+                  <a:srgbClr val="B84E00"/>
+                </a:solidFill>
+              </a:rPr>
+              <a:t>-l</a:t>
+            </a:r>
+            <a:r>
+              <a:rPr>
+                <a:solidFill>
+                  <a:srgbClr val="29263B"/>
+                </a:solidFill>
+              </a:rPr>
+              <a:t xml:space="preserve"> </a:t>
+            </a:r>
+            <a:r>
+              <a:rPr>
+                <a:solidFill>
+                  <a:srgbClr val="0070C0"/>
+                </a:solidFill>
+              </a:rPr>
+              <a:t>build/learning-tools/p003/cmake-demo/zephyr/zephyr.elf</a:t>
+            </a:r>
+            <a:r>
+              <a:rPr>
+                <a:solidFill>
+                  <a:srgbClr val="29263B"/>
+                </a:solidFill>
+              </a:rPr>
+              <a:t xml:space="preserve"> &amp;&amp;</a:t>
+            </a:r>
+          </a:p>
+          <a:p>
+            <a:r>
+              <a:rPr/>
               <a:t>cmake --build build/learning-tools/p003/cmake-demo --parallel 4</a:t>
             </a:r>
           </a:p>
-          <a:p>
-            <a:r>
-              <a:t>ls -l build/learning-tools/p003/cmake-demo/zephyr/zephyr.elf</a:t>
-            </a:r>
-          </a:p>
-          <a:p>
-            <a:r>
-              <a:t># 输入未变，再次构建通常显示 ninja: no work to do.</a:t>
-            </a:r>
-          </a:p>
-          <a:p>
-            <a:r>
-              <a:t>cmake --build build/learning-tools/p003/cmake-demo --parallel 4</a:t>
-            </a:r>
-          </a:p>
-          <a:p>
-            <a:endParaRPr/>
-          </a:p>
-          <a:p>
-            <a:r>
+          <a:p/>
+          <a:p>
+            <a:r>
+              <a:rPr/>
               <a:t>官方说明：https://cmake.org/cmake/help/latest/manual/cmake.1.html</a:t>
             </a:r>
           </a:p>
           <a:p>
             <a:r>
+              <a:rPr/>
               <a:t>固定源码依据：https://github.com/zephyrproject-rtos/zephyr/blob/25c8f4a23988dd3b2cfb463613622738298c2d6c/doc/develop/application/index.rst</a:t>
             </a:r>
           </a:p>
           <a:p>
             <a:r>
+              <a:rPr/>
               <a:t>命令前提：Windows UCRT64，G:/zephyr_practice/zephyr-main。配置和构建操作须先完成 P003—P005 并完成 P008 首次构建检查。应用、板与依赖均使用已有内容，本节只新增单独的构建输出目录。</a:t>
             </a:r>
           </a:p>
@@ -26660,7 +26835,7 @@
                 <a:ea typeface="Microsoft YaHei"/>
                 <a:cs typeface="Microsoft YaHei"/>
               </a:rPr>
-              <a:t>P002：CMake、Ninja、</a:t>
+              <a:t>P002：CMake、Ninja 与已激活的 Python venv；</a:t>
             </a:r>
             <a:r>
               <a:rPr sz="1950" b="0">
@@ -26704,7 +26879,7 @@
                 <a:ea typeface="Microsoft YaHei"/>
                 <a:cs typeface="Microsoft YaHei"/>
               </a:rPr>
-              <a:t> 与已激活的 Python venv。</a:t>
+              <a:t xml:space="preserve"> 按用途准备。</a:t>
             </a:r>
           </a:p>
           <a:p>
@@ -26786,7 +26961,7 @@
                 <a:ea typeface="Microsoft YaHei"/>
                 <a:cs typeface="Microsoft YaHei"/>
               </a:rPr>
-              <a:t> 指向正确工作区，CMSIS_6 入口与 Core 头确实存在。</a:t>
+              <a:t xml:space="preserve"> 指向正确工作区，CMSIS_6 入口与 Core 头确实存在。</a:t>
             </a:r>
           </a:p>
           <a:p>
@@ -30558,7 +30733,7 @@
                 <a:ea typeface="Consolas"/>
                 <a:cs typeface="Consolas"/>
               </a:rPr>
-              <a:t># UCRT64；源码根；前提：上一页配置成功，.venv 已激活。</a:t>
+              <a:t># UCRT64；源码根；上一页配置成功，.venv 已激活。</a:t>
             </a:r>
           </a:p>
           <a:p>
@@ -30580,50 +30755,42 @@
               </a:defRPr>
             </a:pPr>
             <a:r>
-              <a:rPr>
-                <a:solidFill>
-                  <a:srgbClr val="A02B93"/>
-                </a:solidFill>
-              </a:rPr>
-              <a:t>cmake</a:t>
-            </a:r>
-            <a:r>
               <a:rPr sz="1800" b="0">
                 <a:solidFill>
-                  <a:srgbClr val="29263B"/>
+                  <a:srgbClr val="646173"/>
                 </a:solidFill>
                 <a:latin typeface="Consolas"/>
                 <a:ea typeface="Consolas"/>
                 <a:cs typeface="Consolas"/>
               </a:rPr>
-              <a:t> </a:t>
-            </a:r>
-            <a:r>
-              <a:rPr>
-                <a:solidFill>
-                  <a:srgbClr val="B84E00"/>
-                </a:solidFill>
-              </a:rPr>
-              <a:t>--build</a:t>
-            </a:r>
-            <a:r>
-              <a:rPr sz="1800" b="0">
+              <a:t># 前一步成功后才检查 ELF，再观察增量构建。</a:t>
+            </a:r>
+          </a:p>
+          <a:p>
+            <a:pPr>
+              <a:lnSpc>
+                <a:spcPct val="120000"/>
+              </a:lnSpc>
+              <a:spcAft>
+                <a:spcPts val="0"/>
+              </a:spcAft>
+              <a:buNone/>
+              <a:defRPr sz="1800" b="0">
                 <a:solidFill>
                   <a:srgbClr val="29263B"/>
                 </a:solidFill>
                 <a:latin typeface="Consolas"/>
                 <a:ea typeface="Consolas"/>
                 <a:cs typeface="Consolas"/>
-              </a:rPr>
-              <a:t> </a:t>
-            </a:r>
+              </a:defRPr>
+            </a:pPr>
             <a:r>
               <a:rPr>
                 <a:solidFill>
-                  <a:srgbClr val="0070C0"/>
-                </a:solidFill>
-              </a:rPr>
-              <a:t>build/learning-tools/p003/cmake-demo</a:t>
+                  <a:srgbClr val="A02B93"/>
+                </a:solidFill>
+              </a:rPr>
+              <a:t>cmake</a:t>
             </a:r>
             <a:r>
               <a:rPr sz="1800" b="0">
@@ -30634,7 +30801,7 @@
                 <a:ea typeface="Consolas"/>
                 <a:cs typeface="Consolas"/>
               </a:rPr>
-              <a:t> </a:t>
+              <a:t xml:space="preserve"> </a:t>
             </a:r>
             <a:r>
               <a:rPr>
@@ -30642,7 +30809,7 @@
                   <a:srgbClr val="B84E00"/>
                 </a:solidFill>
               </a:rPr>
-              <a:t>--parallel</a:t>
+              <a:t>--build</a:t>
             </a:r>
             <a:r>
               <a:rPr sz="1800" b="0">
@@ -30653,34 +30820,34 @@
                 <a:ea typeface="Consolas"/>
                 <a:cs typeface="Consolas"/>
               </a:rPr>
-              <a:t> 4</a:t>
-            </a:r>
-          </a:p>
-          <a:p>
-            <a:pPr>
-              <a:lnSpc>
-                <a:spcPct val="120000"/>
-              </a:lnSpc>
-              <a:spcAft>
-                <a:spcPts val="0"/>
-              </a:spcAft>
-              <a:buNone/>
-              <a:defRPr sz="1800" b="0">
+              <a:t xml:space="preserve"> </a:t>
+            </a:r>
+            <a:r>
+              <a:rPr>
+                <a:solidFill>
+                  <a:srgbClr val="0070C0"/>
+                </a:solidFill>
+              </a:rPr>
+              <a:t>build/learning-tools/p003/cmake-demo</a:t>
+            </a:r>
+            <a:r>
+              <a:rPr sz="1800" b="0">
                 <a:solidFill>
                   <a:srgbClr val="29263B"/>
                 </a:solidFill>
                 <a:latin typeface="Consolas"/>
                 <a:ea typeface="Consolas"/>
                 <a:cs typeface="Consolas"/>
-              </a:defRPr>
-            </a:pPr>
+              </a:rPr>
+              <a:t xml:space="preserve"> </a:t>
+            </a:r>
             <a:r>
               <a:rPr>
                 <a:solidFill>
-                  <a:srgbClr val="A02B93"/>
-                </a:solidFill>
-              </a:rPr>
-              <a:t>ls</a:t>
+                  <a:srgbClr val="B84E00"/>
+                </a:solidFill>
+              </a:rPr>
+              <a:t>--parallel</a:t>
             </a:r>
             <a:r>
               <a:rPr sz="1800" b="0">
@@ -30691,18 +30858,42 @@
                 <a:ea typeface="Consolas"/>
                 <a:cs typeface="Consolas"/>
               </a:rPr>
-              <a:t> </a:t>
-            </a:r>
-            <a:r>
-              <a:rPr sz="1800" b="0">
-                <a:solidFill>
-                  <a:srgbClr val="B84E00"/>
+              <a:t xml:space="preserve"> 4</a:t>
+            </a:r>
+            <a:r>
+              <a:rPr>
+                <a:solidFill>
+                  <a:srgbClr val="29263B"/>
+                </a:solidFill>
+              </a:rPr>
+              <a:t xml:space="preserve"> &amp;&amp;</a:t>
+            </a:r>
+          </a:p>
+          <a:p>
+            <a:pPr>
+              <a:lnSpc>
+                <a:spcPct val="120000"/>
+              </a:lnSpc>
+              <a:spcAft>
+                <a:spcPts val="0"/>
+              </a:spcAft>
+              <a:buNone/>
+              <a:defRPr sz="1800" b="0">
+                <a:solidFill>
+                  <a:srgbClr val="29263B"/>
                 </a:solidFill>
                 <a:latin typeface="Consolas"/>
                 <a:ea typeface="Consolas"/>
                 <a:cs typeface="Consolas"/>
-              </a:rPr>
-              <a:t>-l</a:t>
+              </a:defRPr>
+            </a:pPr>
+            <a:r>
+              <a:rPr>
+                <a:solidFill>
+                  <a:srgbClr val="A02B93"/>
+                </a:solidFill>
+              </a:rPr>
+              <a:t>ls</a:t>
             </a:r>
             <a:r>
               <a:rPr sz="1800" b="0">
@@ -30713,91 +30904,75 @@
                 <a:ea typeface="Consolas"/>
                 <a:cs typeface="Consolas"/>
               </a:rPr>
-              <a:t> </a:t>
-            </a:r>
-            <a:r>
-              <a:rPr>
-                <a:solidFill>
-                  <a:srgbClr val="0070C0"/>
-                </a:solidFill>
-              </a:rPr>
-              <a:t>build/learning-tools/p003/cmake-demo/zephyr/zephyr.elf</a:t>
-            </a:r>
-          </a:p>
-          <a:p>
-            <a:pPr>
-              <a:lnSpc>
-                <a:spcPct val="120000"/>
-              </a:lnSpc>
-              <a:spcAft>
-                <a:spcPts val="0"/>
-              </a:spcAft>
-              <a:buNone/>
-              <a:defRPr sz="1800" b="0">
-                <a:solidFill>
-                  <a:srgbClr val="29263B"/>
+              <a:t xml:space="preserve"> </a:t>
+            </a:r>
+            <a:r>
+              <a:rPr sz="1800" b="0">
+                <a:solidFill>
+                  <a:srgbClr val="B84E00"/>
                 </a:solidFill>
                 <a:latin typeface="Consolas"/>
                 <a:ea typeface="Consolas"/>
                 <a:cs typeface="Consolas"/>
-              </a:defRPr>
-            </a:pPr>
+              </a:rPr>
+              <a:t>-l</a:t>
+            </a:r>
             <a:r>
               <a:rPr sz="1800" b="0">
                 <a:solidFill>
-                  <a:srgbClr val="646173"/>
+                  <a:srgbClr val="29263B"/>
                 </a:solidFill>
                 <a:latin typeface="Consolas"/>
                 <a:ea typeface="Consolas"/>
                 <a:cs typeface="Consolas"/>
               </a:rPr>
-              <a:t># 输入未变，再次构建通常显示 ninja: no work to do.</a:t>
-            </a:r>
-          </a:p>
-          <a:p>
-            <a:pPr>
-              <a:lnSpc>
-                <a:spcPct val="120000"/>
-              </a:lnSpc>
-              <a:spcAft>
-                <a:spcPts val="0"/>
-              </a:spcAft>
-              <a:buNone/>
-              <a:defRPr sz="1800" b="0">
+              <a:t xml:space="preserve"> </a:t>
+            </a:r>
+            <a:r>
+              <a:rPr>
+                <a:solidFill>
+                  <a:srgbClr val="0070C0"/>
+                </a:solidFill>
+              </a:rPr>
+              <a:t>build/learning-tools/p003/cmake-demo/zephyr/zephyr.elf</a:t>
+            </a:r>
+            <a:r>
+              <a:rPr sz="1800" b="0">
                 <a:solidFill>
                   <a:srgbClr val="29263B"/>
                 </a:solidFill>
                 <a:latin typeface="Consolas"/>
                 <a:ea typeface="Consolas"/>
                 <a:cs typeface="Consolas"/>
-              </a:defRPr>
-            </a:pPr>
-            <a:r>
-              <a:rPr>
-                <a:solidFill>
-                  <a:srgbClr val="A02B93"/>
-                </a:solidFill>
-              </a:rPr>
-              <a:t>cmake</a:t>
-            </a:r>
-            <a:r>
-              <a:rPr sz="1800" b="0">
+              </a:rPr>
+              <a:t xml:space="preserve"> &amp;&amp;</a:t>
+            </a:r>
+          </a:p>
+          <a:p>
+            <a:pPr>
+              <a:lnSpc>
+                <a:spcPct val="120000"/>
+              </a:lnSpc>
+              <a:spcAft>
+                <a:spcPts val="0"/>
+              </a:spcAft>
+              <a:buNone/>
+              <a:defRPr sz="1800" b="0">
                 <a:solidFill>
                   <a:srgbClr val="29263B"/>
                 </a:solidFill>
                 <a:latin typeface="Consolas"/>
                 <a:ea typeface="Consolas"/>
                 <a:cs typeface="Consolas"/>
-              </a:rPr>
-              <a:t> </a:t>
-            </a:r>
+              </a:defRPr>
+            </a:pPr>
             <a:r>
               <a:rPr>
                 <a:solidFill>
-                  <a:srgbClr val="B84E00"/>
-                </a:solidFill>
-              </a:rPr>
-              <a:t>--build</a:t>
+                  <a:srgbClr val="A02B93"/>
+                </a:solidFill>
+              </a:rPr>
+              <a:t>cmake</a:t>
             </a:r>
             <a:r>
               <a:rPr sz="1800" b="0">
@@ -30808,15 +30983,15 @@
                 <a:ea typeface="Consolas"/>
                 <a:cs typeface="Consolas"/>
               </a:rPr>
-              <a:t> </a:t>
+              <a:t xml:space="preserve"> </a:t>
             </a:r>
             <a:r>
               <a:rPr>
                 <a:solidFill>
-                  <a:srgbClr val="0070C0"/>
-                </a:solidFill>
-              </a:rPr>
-              <a:t>build/learning-tools/p003/cmake-demo</a:t>
+                  <a:srgbClr val="B84E00"/>
+                </a:solidFill>
+              </a:rPr>
+              <a:t>--build</a:t>
             </a:r>
             <a:r>
               <a:rPr sz="1800" b="0">
@@ -30827,15 +31002,15 @@
                 <a:ea typeface="Consolas"/>
                 <a:cs typeface="Consolas"/>
               </a:rPr>
-              <a:t> </a:t>
+              <a:t xml:space="preserve"> </a:t>
             </a:r>
             <a:r>
               <a:rPr>
                 <a:solidFill>
-                  <a:srgbClr val="B84E00"/>
-                </a:solidFill>
-              </a:rPr>
-              <a:t>--parallel</a:t>
+                  <a:srgbClr val="0070C0"/>
+                </a:solidFill>
+              </a:rPr>
+              <a:t>build/learning-tools/p003/cmake-demo</a:t>
             </a:r>
             <a:r>
               <a:rPr sz="1800" b="0">
@@ -30846,7 +31021,26 @@
                 <a:ea typeface="Consolas"/>
                 <a:cs typeface="Consolas"/>
               </a:rPr>
-              <a:t> 4</a:t>
+              <a:t xml:space="preserve"> </a:t>
+            </a:r>
+            <a:r>
+              <a:rPr>
+                <a:solidFill>
+                  <a:srgbClr val="B84E00"/>
+                </a:solidFill>
+              </a:rPr>
+              <a:t>--parallel</a:t>
+            </a:r>
+            <a:r>
+              <a:rPr sz="1800" b="0">
+                <a:solidFill>
+                  <a:srgbClr val="29263B"/>
+                </a:solidFill>
+                <a:latin typeface="Consolas"/>
+                <a:ea typeface="Consolas"/>
+                <a:cs typeface="Consolas"/>
+              </a:rPr>
+              <a:t xml:space="preserve"> 4</a:t>
             </a:r>
           </a:p>
         </p:txBody>
@@ -30918,23 +31112,64 @@
                   <a:srgbClr val="A02B93"/>
                 </a:solidFill>
               </a:rPr>
-              <a:t>cmake</a:t>
+              <a:t xml:space="preserve">cmake </a:t>
             </a:r>
             <a:r>
               <a:rPr>
                 <a:solidFill>
-                  <a:srgbClr val="A02B93"/>
-                </a:solidFill>
-              </a:rPr>
-              <a:t> </a:t>
+                  <a:srgbClr val="B84E00"/>
+                </a:solidFill>
+              </a:rPr>
+              <a:t>--build</a:t>
+            </a:r>
+            <a:r>
+              <a:rPr sz="1950" b="0">
+                <a:solidFill>
+                  <a:srgbClr val="29263B"/>
+                </a:solidFill>
+                <a:latin typeface="Microsoft YaHei"/>
+                <a:ea typeface="Microsoft YaHei"/>
+                <a:cs typeface="Microsoft YaHei"/>
+              </a:rPr>
+              <a:t xml:space="preserve"> 调用已配置的 Ninja，不再重复选板。</a:t>
+            </a:r>
+          </a:p>
+          <a:p>
+            <a:pPr>
+              <a:lnSpc>
+                <a:spcPct val="120000"/>
+              </a:lnSpc>
+              <a:spcAft>
+                <a:spcPts val="0"/>
+              </a:spcAft>
+              <a:buNone/>
+              <a:defRPr sz="1950" b="0">
+                <a:solidFill>
+                  <a:srgbClr val="29263B"/>
+                </a:solidFill>
+                <a:latin typeface="Microsoft YaHei"/>
+                <a:ea typeface="Microsoft YaHei"/>
+                <a:cs typeface="Microsoft YaHei"/>
+              </a:defRPr>
+            </a:pPr>
+            <a:r>
+              <a:rPr sz="1950" b="0">
+                <a:solidFill>
+                  <a:srgbClr val="29263B"/>
+                </a:solidFill>
+                <a:latin typeface="Microsoft YaHei"/>
+                <a:ea typeface="Microsoft YaHei"/>
+                <a:cs typeface="Microsoft YaHei"/>
+              </a:rPr>
+              <a:t xml:space="preserve">本次构建成功才核对 </a:t>
             </a:r>
             <a:r>
               <a:rPr>
                 <a:solidFill>
-                  <a:srgbClr val="B84E00"/>
-                </a:solidFill>
-              </a:rPr>
-              <a:t>--build</a:t>
+                  <a:srgbClr val="0070C0"/>
+                </a:solidFill>
+              </a:rPr>
+              <a:t>zephyr/zephyr.elf</a:t>
             </a:r>
             <a:r>
               <a:rPr sz="1950" b="0">
@@ -30945,7 +31180,7 @@
                 <a:ea typeface="Microsoft YaHei"/>
                 <a:cs typeface="Microsoft YaHei"/>
               </a:rPr>
-              <a:t> 调用已配置的 Ninja，不再重复选板。</a:t>
+              <a:t>；旧文件不能证明本次成功。</a:t>
             </a:r>
           </a:p>
           <a:p>
@@ -30975,7 +31210,7 @@
                 <a:ea typeface="Microsoft YaHei"/>
                 <a:cs typeface="Microsoft YaHei"/>
               </a:rPr>
-              <a:t>首次构建得到 </a:t>
+              <a:t xml:space="preserve">修改 </a:t>
             </a:r>
             <a:r>
               <a:rPr>
@@ -30983,7 +31218,7 @@
                   <a:srgbClr val="0070C0"/>
                 </a:solidFill>
               </a:rPr>
-              <a:t>zephyr/zephyr.elf</a:t>
+              <a:t>main.c</a:t>
             </a:r>
             <a:r>
               <a:rPr sz="1950" b="0">
@@ -30994,56 +31229,7 @@
                 <a:ea typeface="Microsoft YaHei"/>
                 <a:cs typeface="Microsoft YaHei"/>
               </a:rPr>
-              <a:t>。无改动时通常无需重编译。</a:t>
-            </a:r>
-          </a:p>
-          <a:p>
-            <a:pPr>
-              <a:lnSpc>
-                <a:spcPct val="120000"/>
-              </a:lnSpc>
-              <a:spcAft>
-                <a:spcPts val="0"/>
-              </a:spcAft>
-              <a:buNone/>
-              <a:defRPr sz="1950" b="0">
-                <a:solidFill>
-                  <a:srgbClr val="29263B"/>
-                </a:solidFill>
-                <a:latin typeface="Microsoft YaHei"/>
-                <a:ea typeface="Microsoft YaHei"/>
-                <a:cs typeface="Microsoft YaHei"/>
-              </a:defRPr>
-            </a:pPr>
-            <a:r>
-              <a:rPr sz="1950" b="0">
-                <a:solidFill>
-                  <a:srgbClr val="29263B"/>
-                </a:solidFill>
-                <a:latin typeface="Microsoft YaHei"/>
-                <a:ea typeface="Microsoft YaHei"/>
-                <a:cs typeface="Microsoft YaHei"/>
-              </a:rPr>
-              <a:t>修改 </a:t>
-            </a:r>
-            <a:r>
-              <a:rPr>
-                <a:solidFill>
-                  <a:srgbClr val="0070C0"/>
-                </a:solidFill>
-              </a:rPr>
-              <a:t>main.c</a:t>
-            </a:r>
-            <a:r>
-              <a:rPr sz="1950" b="0">
-                <a:solidFill>
-                  <a:srgbClr val="29263B"/>
-                </a:solidFill>
-                <a:latin typeface="Microsoft YaHei"/>
-                <a:ea typeface="Microsoft YaHei"/>
-                <a:cs typeface="Microsoft YaHei"/>
-              </a:rPr>
-              <a:t> 后仍用这条命令，按依赖更新对象与链接。</a:t>
+              <a:t xml:space="preserve"> 后仍用这条命令，按依赖更新对象与链接。</a:t>
             </a:r>
           </a:p>
         </p:txBody>
